--- a/dist/초1/수학/모양과비교/초1_수학_모양과비교_02_네모·세모·동그라미모양_학생용.pptx
+++ b/dist/초1/수학/모양과비교/초1_수학_모양과비교_02_네모·세모·동그라미모양_학생용.pptx
@@ -120,13 +120,13 @@
   <p:extLst>
     <p:ext uri="{521415D9-36F7-43E2-AB2F-B90AF26B5E84}">
       <p14:sectionLst xmlns:p14="http://schemas.microsoft.com/office/powerpoint/2010/main">
-        <p14:section name="도입" id="{da5b40d2-04e6-77dd-c341-1f24666b5354}">
+        <p14:section name="도입" id="{49d506e8-8c4d-b5f8-27d4-515e9f10ce2b}">
           <p14:sldIdLst>
             <p14:sldId id="256"/>
             <p14:sldId id="257"/>
           </p14:sldIdLst>
         </p14:section>
-        <p14:section name="개념" id="{59265cbe-c41b-c63e-7fe4-4af7ecb29a88}">
+        <p14:section name="개념" id="{29610ca5-6abd-5c8f-4832-3d37c10e428c}">
           <p14:sldIdLst>
             <p14:sldId id="258"/>
             <p14:sldId id="259"/>
@@ -134,7 +134,7 @@
             <p14:sldId id="261"/>
           </p14:sldIdLst>
         </p14:section>
-        <p14:section name="연습" id="{97e45bbc-7d3d-194c-4424-54826b007322}">
+        <p14:section name="연습" id="{02f9b342-dd4a-2aa4-586d-c44a23b02915}">
           <p14:sldIdLst>
             <p14:sldId id="262"/>
             <p14:sldId id="263"/>
@@ -142,18 +142,18 @@
             <p14:sldId id="265"/>
           </p14:sldIdLst>
         </p14:section>
-        <p14:section name="확인" id="{aec92d1d-46c7-1fe4-dbbe-9ff5286c23c5}">
+        <p14:section name="확인" id="{e90f53e6-4d55-003e-5d50-746c6f2781d6}">
           <p14:sldIdLst>
             <p14:sldId id="266"/>
             <p14:sldId id="267"/>
           </p14:sldIdLst>
         </p14:section>
-        <p14:section name="정리" id="{b1c981f9-a25a-43ae-93af-d2e57c195a35}">
+        <p14:section name="정리" id="{0808e674-8ebb-91da-547f-c218642ffe34}">
           <p14:sldIdLst>
             <p14:sldId id="268"/>
           </p14:sldIdLst>
         </p14:section>
-        <p14:section name="보충" id="{914f9329-d1ed-1d79-a436-6e150f452d46}">
+        <p14:section name="보충" id="{14a7b189-e530-f3a5-e1e6-701049cae943}">
           <p14:sldIdLst>
             <p14:sldId id="269"/>
           </p14:sldIdLst>

--- a/dist/초1/수학/모양과비교/초1_수학_모양과비교_02_네모·세모·동그라미모양_학생용.pptx
+++ b/dist/초1/수학/모양과비교/초1_수학_모양과비교_02_네모·세모·동그라미모양_학생용.pptx
@@ -120,13 +120,13 @@
   <p:extLst>
     <p:ext uri="{521415D9-36F7-43E2-AB2F-B90AF26B5E84}">
       <p14:sectionLst xmlns:p14="http://schemas.microsoft.com/office/powerpoint/2010/main">
-        <p14:section name="도입" id="{49d506e8-8c4d-b5f8-27d4-515e9f10ce2b}">
+        <p14:section name="도입" id="{59995b39-0118-1296-fb71-153b9fb83b8c}">
           <p14:sldIdLst>
             <p14:sldId id="256"/>
             <p14:sldId id="257"/>
           </p14:sldIdLst>
         </p14:section>
-        <p14:section name="개념" id="{29610ca5-6abd-5c8f-4832-3d37c10e428c}">
+        <p14:section name="개념" id="{c3f0c037-1fe9-53e3-6411-1917632467ae}">
           <p14:sldIdLst>
             <p14:sldId id="258"/>
             <p14:sldId id="259"/>
@@ -134,7 +134,7 @@
             <p14:sldId id="261"/>
           </p14:sldIdLst>
         </p14:section>
-        <p14:section name="연습" id="{02f9b342-dd4a-2aa4-586d-c44a23b02915}">
+        <p14:section name="연습" id="{067db3dd-2e94-bfbb-2110-54a91e78652c}">
           <p14:sldIdLst>
             <p14:sldId id="262"/>
             <p14:sldId id="263"/>
@@ -142,18 +142,18 @@
             <p14:sldId id="265"/>
           </p14:sldIdLst>
         </p14:section>
-        <p14:section name="확인" id="{e90f53e6-4d55-003e-5d50-746c6f2781d6}">
+        <p14:section name="확인" id="{ae4a971e-ef88-4d18-48fc-95fa2106f1da}">
           <p14:sldIdLst>
             <p14:sldId id="266"/>
             <p14:sldId id="267"/>
           </p14:sldIdLst>
         </p14:section>
-        <p14:section name="정리" id="{0808e674-8ebb-91da-547f-c218642ffe34}">
+        <p14:section name="정리" id="{b5573059-3636-1cdb-64eb-8b399e7ff236}">
           <p14:sldIdLst>
             <p14:sldId id="268"/>
           </p14:sldIdLst>
         </p14:section>
-        <p14:section name="보충" id="{14a7b189-e530-f3a5-e1e6-701049cae943}">
+        <p14:section name="보충" id="{751bafe8-5333-c6de-401a-c4ba47f88da5}">
           <p14:sldIdLst>
             <p14:sldId id="269"/>
           </p14:sldIdLst>
@@ -2789,7 +2789,7 @@
               <a:buNone/>
             </a:pPr>
             <a:r>
-              <a:rPr lang="ko-KR" altLang="en-US" sz="5000" b="1" dirty="0">
+              <a:rPr lang="ko-KR" altLang="en-US" sz="4800" b="1" dirty="0">
                 <a:solidFill>
                   <a:srgbClr val="FFFFFF"/>
                 </a:solidFill>
